--- a/PPTs/Lecture 0 - Course Overview.pptx
+++ b/PPTs/Lecture 0 - Course Overview.pptx
@@ -134,7 +134,7 @@
 <file path=ppt/revisionInfo.xml><?xml version="1.0" encoding="utf-8"?>
 <p1510:revInfo xmlns:a="http://schemas.openxmlformats.org/drawingml/2006/main" xmlns:r="http://schemas.openxmlformats.org/officeDocument/2006/relationships" xmlns:p1510="http://schemas.microsoft.com/office/powerpoint/2015/10/main">
   <p1510:revLst>
-    <p1510:client id="{B8300592-E8BD-4EEB-B382-9E8D2193D28A}" v="4" dt="2025-12-31T21:13:12.366"/>
+    <p1510:client id="{A34F07F5-B12A-49B1-B993-6EBB42C346F6}" v="12" dt="2026-01-25T18:11:26.736"/>
   </p1510:revLst>
 </p1510:revInfo>
 </file>
@@ -144,7 +144,7 @@
   <pc:docChgLst>
     <pc:chgData name="Zonghua Gu" userId="9a7e1853e1951ef5" providerId="LiveId" clId="{CF1FAA12-072C-4ED5-BA76-0FFFAEFDB88A}"/>
     <pc:docChg chg="undo redo custSel addSld delSld modSld">
-      <pc:chgData name="Zonghua Gu" userId="9a7e1853e1951ef5" providerId="LiveId" clId="{CF1FAA12-072C-4ED5-BA76-0FFFAEFDB88A}" dt="2025-12-31T21:31:54.317" v="441" actId="3626"/>
+      <pc:chgData name="Zonghua Gu" userId="9a7e1853e1951ef5" providerId="LiveId" clId="{CF1FAA12-072C-4ED5-BA76-0FFFAEFDB88A}" dt="2026-01-25T18:12:54.568" v="817" actId="20577"/>
       <pc:docMkLst>
         <pc:docMk/>
       </pc:docMkLst>
@@ -174,6 +174,172 @@
           <ac:spMkLst>
             <pc:docMk/>
             <pc:sldMk cId="155059883" sldId="261"/>
+            <ac:spMk id="3" creationId="{00000000-0000-0000-0000-000000000000}"/>
+          </ac:spMkLst>
+        </pc:spChg>
+      </pc:sldChg>
+      <pc:sldChg chg="addSp delSp modSp mod modNotesTx">
+        <pc:chgData name="Zonghua Gu" userId="9a7e1853e1951ef5" providerId="LiveId" clId="{CF1FAA12-072C-4ED5-BA76-0FFFAEFDB88A}" dt="2026-01-25T18:12:54.568" v="817" actId="20577"/>
+        <pc:sldMkLst>
+          <pc:docMk/>
+          <pc:sldMk cId="3772300189" sldId="263"/>
+        </pc:sldMkLst>
+        <pc:spChg chg="add mod">
+          <ac:chgData name="Zonghua Gu" userId="9a7e1853e1951ef5" providerId="LiveId" clId="{CF1FAA12-072C-4ED5-BA76-0FFFAEFDB88A}" dt="2026-01-25T18:11:13.105" v="661" actId="1076"/>
+          <ac:spMkLst>
+            <pc:docMk/>
+            <pc:sldMk cId="3772300189" sldId="263"/>
+            <ac:spMk id="5" creationId="{AE41FB57-E05E-E37B-2179-98D14191727D}"/>
+          </ac:spMkLst>
+        </pc:spChg>
+        <pc:spChg chg="del">
+          <ac:chgData name="Zonghua Gu" userId="9a7e1853e1951ef5" providerId="LiveId" clId="{CF1FAA12-072C-4ED5-BA76-0FFFAEFDB88A}" dt="2026-01-25T18:06:18.623" v="449" actId="21"/>
+          <ac:spMkLst>
+            <pc:docMk/>
+            <pc:sldMk cId="3772300189" sldId="263"/>
+            <ac:spMk id="6" creationId="{AE41FB57-E05E-E37B-2179-98D14191727D}"/>
+          </ac:spMkLst>
+        </pc:spChg>
+        <pc:spChg chg="del">
+          <ac:chgData name="Zonghua Gu" userId="9a7e1853e1951ef5" providerId="LiveId" clId="{CF1FAA12-072C-4ED5-BA76-0FFFAEFDB88A}" dt="2026-01-25T18:06:18.623" v="449" actId="21"/>
+          <ac:spMkLst>
+            <pc:docMk/>
+            <pc:sldMk cId="3772300189" sldId="263"/>
+            <ac:spMk id="7" creationId="{73A14233-5BD4-DCD3-E927-56FF876CF7EA}"/>
+          </ac:spMkLst>
+        </pc:spChg>
+        <pc:spChg chg="del">
+          <ac:chgData name="Zonghua Gu" userId="9a7e1853e1951ef5" providerId="LiveId" clId="{CF1FAA12-072C-4ED5-BA76-0FFFAEFDB88A}" dt="2026-01-25T18:06:18.623" v="449" actId="21"/>
+          <ac:spMkLst>
+            <pc:docMk/>
+            <pc:sldMk cId="3772300189" sldId="263"/>
+            <ac:spMk id="8" creationId="{5E8C800B-92A5-CEC8-8A8B-200008609C9E}"/>
+          </ac:spMkLst>
+        </pc:spChg>
+        <pc:spChg chg="del">
+          <ac:chgData name="Zonghua Gu" userId="9a7e1853e1951ef5" providerId="LiveId" clId="{CF1FAA12-072C-4ED5-BA76-0FFFAEFDB88A}" dt="2026-01-25T18:06:18.623" v="449" actId="21"/>
+          <ac:spMkLst>
+            <pc:docMk/>
+            <pc:sldMk cId="3772300189" sldId="263"/>
+            <ac:spMk id="9" creationId="{6AD677F5-5130-722F-D935-AAD4400A7119}"/>
+          </ac:spMkLst>
+        </pc:spChg>
+        <pc:spChg chg="mod">
+          <ac:chgData name="Zonghua Gu" userId="9a7e1853e1951ef5" providerId="LiveId" clId="{CF1FAA12-072C-4ED5-BA76-0FFFAEFDB88A}" dt="2026-01-25T18:12:54.568" v="817" actId="20577"/>
+          <ac:spMkLst>
+            <pc:docMk/>
+            <pc:sldMk cId="3772300189" sldId="263"/>
+            <ac:spMk id="10" creationId="{4485C2FC-F760-8450-0E62-F59CB3DFE20C}"/>
+          </ac:spMkLst>
+        </pc:spChg>
+        <pc:spChg chg="add mod">
+          <ac:chgData name="Zonghua Gu" userId="9a7e1853e1951ef5" providerId="LiveId" clId="{CF1FAA12-072C-4ED5-BA76-0FFFAEFDB88A}" dt="2026-01-25T18:11:13.105" v="661" actId="1076"/>
+          <ac:spMkLst>
+            <pc:docMk/>
+            <pc:sldMk cId="3772300189" sldId="263"/>
+            <ac:spMk id="11" creationId="{73A14233-5BD4-DCD3-E927-56FF876CF7EA}"/>
+          </ac:spMkLst>
+        </pc:spChg>
+        <pc:spChg chg="add mod">
+          <ac:chgData name="Zonghua Gu" userId="9a7e1853e1951ef5" providerId="LiveId" clId="{CF1FAA12-072C-4ED5-BA76-0FFFAEFDB88A}" dt="2026-01-25T18:11:13.105" v="661" actId="1076"/>
+          <ac:spMkLst>
+            <pc:docMk/>
+            <pc:sldMk cId="3772300189" sldId="263"/>
+            <ac:spMk id="12" creationId="{5E8C800B-92A5-CEC8-8A8B-200008609C9E}"/>
+          </ac:spMkLst>
+        </pc:spChg>
+        <pc:spChg chg="add mod">
+          <ac:chgData name="Zonghua Gu" userId="9a7e1853e1951ef5" providerId="LiveId" clId="{CF1FAA12-072C-4ED5-BA76-0FFFAEFDB88A}" dt="2026-01-25T18:11:13.105" v="661" actId="1076"/>
+          <ac:spMkLst>
+            <pc:docMk/>
+            <pc:sldMk cId="3772300189" sldId="263"/>
+            <ac:spMk id="13" creationId="{6AD677F5-5130-722F-D935-AAD4400A7119}"/>
+          </ac:spMkLst>
+        </pc:spChg>
+        <pc:spChg chg="add mod">
+          <ac:chgData name="Zonghua Gu" userId="9a7e1853e1951ef5" providerId="LiveId" clId="{CF1FAA12-072C-4ED5-BA76-0FFFAEFDB88A}" dt="2026-01-25T18:11:13.105" v="661" actId="1076"/>
+          <ac:spMkLst>
+            <pc:docMk/>
+            <pc:sldMk cId="3772300189" sldId="263"/>
+            <ac:spMk id="14" creationId="{D86E3090-D52C-74EE-3FD8-F0F7D63579A8}"/>
+          </ac:spMkLst>
+        </pc:spChg>
+        <pc:spChg chg="add mod">
+          <ac:chgData name="Zonghua Gu" userId="9a7e1853e1951ef5" providerId="LiveId" clId="{CF1FAA12-072C-4ED5-BA76-0FFFAEFDB88A}" dt="2026-01-25T18:11:13.105" v="661" actId="1076"/>
+          <ac:spMkLst>
+            <pc:docMk/>
+            <pc:sldMk cId="3772300189" sldId="263"/>
+            <ac:spMk id="15" creationId="{D6628709-AA79-91C6-7670-135A10137CB9}"/>
+          </ac:spMkLst>
+        </pc:spChg>
+        <pc:spChg chg="add mod">
+          <ac:chgData name="Zonghua Gu" userId="9a7e1853e1951ef5" providerId="LiveId" clId="{CF1FAA12-072C-4ED5-BA76-0FFFAEFDB88A}" dt="2026-01-25T18:11:13.105" v="661" actId="1076"/>
+          <ac:spMkLst>
+            <pc:docMk/>
+            <pc:sldMk cId="3772300189" sldId="263"/>
+            <ac:spMk id="16" creationId="{361DE0F8-AE86-B7E3-41E1-FC7BDF3EBD0A}"/>
+          </ac:spMkLst>
+        </pc:spChg>
+        <pc:picChg chg="add mod">
+          <ac:chgData name="Zonghua Gu" userId="9a7e1853e1951ef5" providerId="LiveId" clId="{CF1FAA12-072C-4ED5-BA76-0FFFAEFDB88A}" dt="2026-01-25T18:11:13.105" v="661" actId="1076"/>
+          <ac:picMkLst>
+            <pc:docMk/>
+            <pc:sldMk cId="3772300189" sldId="263"/>
+            <ac:picMk id="4" creationId="{6941995E-190C-7957-D9E3-C29097E3AD22}"/>
+          </ac:picMkLst>
+        </pc:picChg>
+        <pc:picChg chg="add del">
+          <ac:chgData name="Zonghua Gu" userId="9a7e1853e1951ef5" providerId="LiveId" clId="{CF1FAA12-072C-4ED5-BA76-0FFFAEFDB88A}" dt="2026-01-25T18:06:09.391" v="444" actId="478"/>
+          <ac:picMkLst>
+            <pc:docMk/>
+            <pc:sldMk cId="3772300189" sldId="263"/>
+            <ac:picMk id="1026" creationId="{D2471F95-F060-B55F-2F0D-A33962AFEFDE}"/>
+          </ac:picMkLst>
+        </pc:picChg>
+        <pc:cxnChg chg="add mod">
+          <ac:chgData name="Zonghua Gu" userId="9a7e1853e1951ef5" providerId="LiveId" clId="{CF1FAA12-072C-4ED5-BA76-0FFFAEFDB88A}" dt="2026-01-25T18:11:13.105" v="661" actId="1076"/>
+          <ac:cxnSpMkLst>
+            <pc:docMk/>
+            <pc:sldMk cId="3772300189" sldId="263"/>
+            <ac:cxnSpMk id="18" creationId="{C0E80ACE-A51A-CCB5-6D61-FB78442D180F}"/>
+          </ac:cxnSpMkLst>
+        </pc:cxnChg>
+        <pc:cxnChg chg="add mod">
+          <ac:chgData name="Zonghua Gu" userId="9a7e1853e1951ef5" providerId="LiveId" clId="{CF1FAA12-072C-4ED5-BA76-0FFFAEFDB88A}" dt="2026-01-25T18:09:24.922" v="500" actId="12789"/>
+          <ac:cxnSpMkLst>
+            <pc:docMk/>
+            <pc:sldMk cId="3772300189" sldId="263"/>
+            <ac:cxnSpMk id="20" creationId="{32AB04AC-00A9-C51E-9E21-EC80A92DCD51}"/>
+          </ac:cxnSpMkLst>
+        </pc:cxnChg>
+        <pc:cxnChg chg="add mod">
+          <ac:chgData name="Zonghua Gu" userId="9a7e1853e1951ef5" providerId="LiveId" clId="{CF1FAA12-072C-4ED5-BA76-0FFFAEFDB88A}" dt="2026-01-25T18:11:13.105" v="661" actId="1076"/>
+          <ac:cxnSpMkLst>
+            <pc:docMk/>
+            <pc:sldMk cId="3772300189" sldId="263"/>
+            <ac:cxnSpMk id="22" creationId="{2E058877-9E26-CD16-4D9E-416ACBDE6556}"/>
+          </ac:cxnSpMkLst>
+        </pc:cxnChg>
+        <pc:cxnChg chg="add del mod">
+          <ac:chgData name="Zonghua Gu" userId="9a7e1853e1951ef5" providerId="LiveId" clId="{CF1FAA12-072C-4ED5-BA76-0FFFAEFDB88A}" dt="2026-01-25T18:09:02.559" v="496" actId="478"/>
+          <ac:cxnSpMkLst>
+            <pc:docMk/>
+            <pc:sldMk cId="3772300189" sldId="263"/>
+            <ac:cxnSpMk id="24" creationId="{ACADA226-CF7F-3C40-354E-3BD265FA36CC}"/>
+          </ac:cxnSpMkLst>
+        </pc:cxnChg>
+      </pc:sldChg>
+      <pc:sldChg chg="modSp mod">
+        <pc:chgData name="Zonghua Gu" userId="9a7e1853e1951ef5" providerId="LiveId" clId="{CF1FAA12-072C-4ED5-BA76-0FFFAEFDB88A}" dt="2026-01-25T18:12:40.984" v="816" actId="20577"/>
+        <pc:sldMkLst>
+          <pc:docMk/>
+          <pc:sldMk cId="52125225" sldId="264"/>
+        </pc:sldMkLst>
+        <pc:spChg chg="mod">
+          <ac:chgData name="Zonghua Gu" userId="9a7e1853e1951ef5" providerId="LiveId" clId="{CF1FAA12-072C-4ED5-BA76-0FFFAEFDB88A}" dt="2026-01-25T18:12:40.984" v="816" actId="20577"/>
+          <ac:spMkLst>
+            <pc:docMk/>
+            <pc:sldMk cId="52125225" sldId="264"/>
             <ac:spMk id="3" creationId="{00000000-0000-0000-0000-000000000000}"/>
           </ac:spMkLst>
         </pc:spChg>
@@ -288,7 +454,7 @@
           <a:p>
             <a:fld id="{42A0EB13-15AA-4F17-85B5-7D7BBF18EB40}" type="datetimeFigureOut">
               <a:rPr lang="en-SE" smtClean="0"/>
-              <a:t>12/31/2025</a:t>
+              <a:t>01/25/2026</a:t>
             </a:fld>
             <a:endParaRPr lang="en-SE"/>
           </a:p>
@@ -800,6 +966,23 @@
               <a:t>https://www.simplypsychology.org/normal-distribution.html</a:t>
             </a:r>
           </a:p>
+          <a:p>
+            <a:pPr lvl="1"/>
+            <a:r>
+              <a:rPr lang="en-US" dirty="0"/>
+              <a:t>Graded on a curve based on the final points</a:t>
+            </a:r>
+          </a:p>
+          <a:p>
+            <a:pPr lvl="1"/>
+            <a:r>
+              <a:rPr lang="en-US" dirty="0"/>
+              <a:t>Absolute marks do not matter, but your relative ranking in the class determines your final letter grade</a:t>
+            </a:r>
+          </a:p>
+          <a:p>
+            <a:endParaRPr lang="en-US" dirty="0"/>
+          </a:p>
         </p:txBody>
       </p:sp>
       <p:sp>
@@ -1023,9 +1206,9 @@
           <a:bodyPr/>
           <a:lstStyle/>
           <a:p>
-            <a:fld id="{FB221443-D73C-634A-A910-7320408C156D}" type="datetimeFigureOut">
+            <a:fld id="{D40EA4EB-E4ED-4B3A-BE74-FBD9F9C1D652}" type="datetime1">
               <a:rPr lang="en-US" smtClean="0"/>
-              <a:t>12/31/2025</a:t>
+              <a:t>1/25/2026</a:t>
             </a:fld>
             <a:endParaRPr lang="en-US"/>
           </a:p>
@@ -1193,9 +1376,9 @@
           <a:bodyPr/>
           <a:lstStyle/>
           <a:p>
-            <a:fld id="{FB221443-D73C-634A-A910-7320408C156D}" type="datetimeFigureOut">
+            <a:fld id="{2D14D089-1561-42E4-920A-49C090297DB5}" type="datetime1">
               <a:rPr lang="en-US" smtClean="0"/>
-              <a:t>12/31/2025</a:t>
+              <a:t>1/25/2026</a:t>
             </a:fld>
             <a:endParaRPr lang="en-US"/>
           </a:p>
@@ -1373,9 +1556,9 @@
           <a:bodyPr/>
           <a:lstStyle/>
           <a:p>
-            <a:fld id="{FB221443-D73C-634A-A910-7320408C156D}" type="datetimeFigureOut">
+            <a:fld id="{C03F4564-C011-4FA6-8FDD-379CD397DE31}" type="datetime1">
               <a:rPr lang="en-US" smtClean="0"/>
-              <a:t>12/31/2025</a:t>
+              <a:t>1/25/2026</a:t>
             </a:fld>
             <a:endParaRPr lang="en-US"/>
           </a:p>
@@ -1543,9 +1726,9 @@
           <a:bodyPr/>
           <a:lstStyle/>
           <a:p>
-            <a:fld id="{FB221443-D73C-634A-A910-7320408C156D}" type="datetimeFigureOut">
+            <a:fld id="{90EAE983-20A3-49A6-A068-F5BC5FA263A4}" type="datetime1">
               <a:rPr lang="en-US" smtClean="0"/>
-              <a:t>12/31/2025</a:t>
+              <a:t>1/25/2026</a:t>
             </a:fld>
             <a:endParaRPr lang="en-US"/>
           </a:p>
@@ -1789,9 +1972,9 @@
           <a:bodyPr/>
           <a:lstStyle/>
           <a:p>
-            <a:fld id="{FB221443-D73C-634A-A910-7320408C156D}" type="datetimeFigureOut">
+            <a:fld id="{29B5AB25-352D-4439-B9E8-25C772813F9A}" type="datetime1">
               <a:rPr lang="en-US" smtClean="0"/>
-              <a:t>12/31/2025</a:t>
+              <a:t>1/25/2026</a:t>
             </a:fld>
             <a:endParaRPr lang="en-US"/>
           </a:p>
@@ -2077,9 +2260,9 @@
           <a:bodyPr/>
           <a:lstStyle/>
           <a:p>
-            <a:fld id="{FB221443-D73C-634A-A910-7320408C156D}" type="datetimeFigureOut">
+            <a:fld id="{E8515DEA-7B84-4F12-AAD2-D24B54C16680}" type="datetime1">
               <a:rPr lang="en-US" smtClean="0"/>
-              <a:t>12/31/2025</a:t>
+              <a:t>1/25/2026</a:t>
             </a:fld>
             <a:endParaRPr lang="en-US"/>
           </a:p>
@@ -2499,9 +2682,9 @@
           <a:bodyPr/>
           <a:lstStyle/>
           <a:p>
-            <a:fld id="{FB221443-D73C-634A-A910-7320408C156D}" type="datetimeFigureOut">
+            <a:fld id="{6F619112-23E6-48C1-A2FF-EDD6E5849501}" type="datetime1">
               <a:rPr lang="en-US" smtClean="0"/>
-              <a:t>12/31/2025</a:t>
+              <a:t>1/25/2026</a:t>
             </a:fld>
             <a:endParaRPr lang="en-US"/>
           </a:p>
@@ -2617,9 +2800,9 @@
           <a:bodyPr/>
           <a:lstStyle/>
           <a:p>
-            <a:fld id="{FB221443-D73C-634A-A910-7320408C156D}" type="datetimeFigureOut">
+            <a:fld id="{F46E8EAE-ABEF-463A-82E7-6556C2C6C385}" type="datetime1">
               <a:rPr lang="en-US" smtClean="0"/>
-              <a:t>12/31/2025</a:t>
+              <a:t>1/25/2026</a:t>
             </a:fld>
             <a:endParaRPr lang="en-US"/>
           </a:p>
@@ -2712,9 +2895,9 @@
           <a:bodyPr/>
           <a:lstStyle/>
           <a:p>
-            <a:fld id="{FB221443-D73C-634A-A910-7320408C156D}" type="datetimeFigureOut">
+            <a:fld id="{75752D47-0D89-4D4F-876F-A4AC4B408BCC}" type="datetime1">
               <a:rPr lang="en-US" smtClean="0"/>
-              <a:t>12/31/2025</a:t>
+              <a:t>1/25/2026</a:t>
             </a:fld>
             <a:endParaRPr lang="en-US"/>
           </a:p>
@@ -2989,9 +3172,9 @@
           <a:bodyPr/>
           <a:lstStyle/>
           <a:p>
-            <a:fld id="{FB221443-D73C-634A-A910-7320408C156D}" type="datetimeFigureOut">
+            <a:fld id="{0D5E81B1-1CF4-45A7-AD67-02AEE48412D6}" type="datetime1">
               <a:rPr lang="en-US" smtClean="0"/>
-              <a:t>12/31/2025</a:t>
+              <a:t>1/25/2026</a:t>
             </a:fld>
             <a:endParaRPr lang="en-US"/>
           </a:p>
@@ -3242,9 +3425,9 @@
           <a:bodyPr/>
           <a:lstStyle/>
           <a:p>
-            <a:fld id="{FB221443-D73C-634A-A910-7320408C156D}" type="datetimeFigureOut">
+            <a:fld id="{0BD913B4-BD8D-4513-AD48-FEC6D895F346}" type="datetime1">
               <a:rPr lang="en-US" smtClean="0"/>
-              <a:t>12/31/2025</a:t>
+              <a:t>1/25/2026</a:t>
             </a:fld>
             <a:endParaRPr lang="en-US"/>
           </a:p>
@@ -3455,9 +3638,9 @@
             </a:lvl1pPr>
           </a:lstStyle>
           <a:p>
-            <a:fld id="{FB221443-D73C-634A-A910-7320408C156D}" type="datetimeFigureOut">
+            <a:fld id="{145680A6-9776-4923-98DA-58C1429A2573}" type="datetime1">
               <a:rPr lang="en-US" smtClean="0"/>
-              <a:t>12/31/2025</a:t>
+              <a:t>1/25/2026</a:t>
             </a:fld>
             <a:endParaRPr lang="en-US"/>
           </a:p>
@@ -3562,6 +3745,7 @@
     <p:sldLayoutId id="2147483658" r:id="rId10"/>
     <p:sldLayoutId id="2147483659" r:id="rId11"/>
   </p:sldLayoutIdLst>
+  <p:hf hdr="0" ftr="0" dt="0"/>
   <p:txStyles>
     <p:titleStyle>
       <a:lvl1pPr algn="ctr" defTabSz="457200" rtl="0" eaLnBrk="1" latinLnBrk="0" hangingPunct="1">
@@ -4054,6 +4238,35 @@
           </a:p>
         </p:txBody>
       </p:sp>
+      <p:sp>
+        <p:nvSpPr>
+          <p:cNvPr id="4" name="Slide Number Placeholder 3">
+            <a:extLst>
+              <a:ext uri="{FF2B5EF4-FFF2-40B4-BE49-F238E27FC236}">
+                <a16:creationId xmlns:a16="http://schemas.microsoft.com/office/drawing/2014/main" id="{9E61C298-445D-EAC9-88B0-E7763FFB75E9}"/>
+              </a:ext>
+            </a:extLst>
+          </p:cNvPr>
+          <p:cNvSpPr>
+            <a:spLocks noGrp="1"/>
+          </p:cNvSpPr>
+          <p:nvPr>
+            <p:ph type="sldNum" sz="quarter" idx="12"/>
+          </p:nvPr>
+        </p:nvSpPr>
+        <p:spPr/>
+        <p:txBody>
+          <a:bodyPr/>
+          <a:lstStyle/>
+          <a:p>
+            <a:fld id="{325BE2B7-23DB-644D-89A2-CA3C2E8FEF83}" type="slidenum">
+              <a:rPr lang="en-US" smtClean="0"/>
+              <a:t>1</a:t>
+            </a:fld>
+            <a:endParaRPr lang="en-US"/>
+          </a:p>
+        </p:txBody>
+      </p:sp>
     </p:spTree>
     <p:extLst>
       <p:ext uri="{BB962C8B-B14F-4D97-AF65-F5344CB8AC3E}">
@@ -4226,6 +4439,35 @@
               <a:t>2:40-4:05 pm</a:t>
             </a:r>
             <a:endParaRPr lang="en-GB" dirty="0"/>
+          </a:p>
+        </p:txBody>
+      </p:sp>
+      <p:sp>
+        <p:nvSpPr>
+          <p:cNvPr id="4" name="Slide Number Placeholder 3">
+            <a:extLst>
+              <a:ext uri="{FF2B5EF4-FFF2-40B4-BE49-F238E27FC236}">
+                <a16:creationId xmlns:a16="http://schemas.microsoft.com/office/drawing/2014/main" id="{E6B6C18F-7E16-C498-C294-683A1596C78B}"/>
+              </a:ext>
+            </a:extLst>
+          </p:cNvPr>
+          <p:cNvSpPr>
+            <a:spLocks noGrp="1"/>
+          </p:cNvSpPr>
+          <p:nvPr>
+            <p:ph type="sldNum" sz="quarter" idx="12"/>
+          </p:nvPr>
+        </p:nvSpPr>
+        <p:spPr/>
+        <p:txBody>
+          <a:bodyPr/>
+          <a:lstStyle/>
+          <a:p>
+            <a:fld id="{325BE2B7-23DB-644D-89A2-CA3C2E8FEF83}" type="slidenum">
+              <a:rPr lang="en-US" smtClean="0"/>
+              <a:t>2</a:t>
+            </a:fld>
+            <a:endParaRPr lang="en-US"/>
           </a:p>
         </p:txBody>
       </p:sp>
@@ -4392,6 +4634,35 @@
           </a:p>
         </p:txBody>
       </p:sp>
+      <p:sp>
+        <p:nvSpPr>
+          <p:cNvPr id="4" name="Slide Number Placeholder 3">
+            <a:extLst>
+              <a:ext uri="{FF2B5EF4-FFF2-40B4-BE49-F238E27FC236}">
+                <a16:creationId xmlns:a16="http://schemas.microsoft.com/office/drawing/2014/main" id="{FCD7B981-E7A4-11AD-1F6F-B6F3CDA22AB0}"/>
+              </a:ext>
+            </a:extLst>
+          </p:cNvPr>
+          <p:cNvSpPr>
+            <a:spLocks noGrp="1"/>
+          </p:cNvSpPr>
+          <p:nvPr>
+            <p:ph type="sldNum" sz="quarter" idx="12"/>
+          </p:nvPr>
+        </p:nvSpPr>
+        <p:spPr/>
+        <p:txBody>
+          <a:bodyPr/>
+          <a:lstStyle/>
+          <a:p>
+            <a:fld id="{325BE2B7-23DB-644D-89A2-CA3C2E8FEF83}" type="slidenum">
+              <a:rPr lang="en-US" smtClean="0"/>
+              <a:t>3</a:t>
+            </a:fld>
+            <a:endParaRPr lang="en-US"/>
+          </a:p>
+        </p:txBody>
+      </p:sp>
     </p:spTree>
     <p:extLst>
       <p:ext uri="{BB962C8B-B14F-4D97-AF65-F5344CB8AC3E}">
@@ -4488,7 +4759,35 @@
               <a:rPr lang="en-US" altLang="zh-CN" dirty="0"/>
               <a:t>only</a:t>
             </a:r>
-            <a:endParaRPr lang="en-US" dirty="0"/>
+          </a:p>
+        </p:txBody>
+      </p:sp>
+      <p:sp>
+        <p:nvSpPr>
+          <p:cNvPr id="4" name="Slide Number Placeholder 3">
+            <a:extLst>
+              <a:ext uri="{FF2B5EF4-FFF2-40B4-BE49-F238E27FC236}">
+                <a16:creationId xmlns:a16="http://schemas.microsoft.com/office/drawing/2014/main" id="{656D0254-8404-3D52-5698-72A68CBD13ED}"/>
+              </a:ext>
+            </a:extLst>
+          </p:cNvPr>
+          <p:cNvSpPr>
+            <a:spLocks noGrp="1"/>
+          </p:cNvSpPr>
+          <p:nvPr>
+            <p:ph type="sldNum" sz="quarter" idx="12"/>
+          </p:nvPr>
+        </p:nvSpPr>
+        <p:spPr/>
+        <p:txBody>
+          <a:bodyPr/>
+          <a:lstStyle/>
+          <a:p>
+            <a:fld id="{325BE2B7-23DB-644D-89A2-CA3C2E8FEF83}" type="slidenum">
+              <a:rPr lang="en-US" smtClean="0"/>
+              <a:t>4</a:t>
+            </a:fld>
+            <a:endParaRPr lang="en-US"/>
           </a:p>
         </p:txBody>
       </p:sp>
@@ -4618,6 +4917,35 @@
           </a:p>
         </p:txBody>
       </p:sp>
+      <p:sp>
+        <p:nvSpPr>
+          <p:cNvPr id="4" name="Slide Number Placeholder 3">
+            <a:extLst>
+              <a:ext uri="{FF2B5EF4-FFF2-40B4-BE49-F238E27FC236}">
+                <a16:creationId xmlns:a16="http://schemas.microsoft.com/office/drawing/2014/main" id="{5CE540F7-0B29-F9C6-774C-F2CCB88B36F9}"/>
+              </a:ext>
+            </a:extLst>
+          </p:cNvPr>
+          <p:cNvSpPr>
+            <a:spLocks noGrp="1"/>
+          </p:cNvSpPr>
+          <p:nvPr>
+            <p:ph type="sldNum" sz="quarter" idx="12"/>
+          </p:nvPr>
+        </p:nvSpPr>
+        <p:spPr/>
+        <p:txBody>
+          <a:bodyPr/>
+          <a:lstStyle/>
+          <a:p>
+            <a:fld id="{325BE2B7-23DB-644D-89A2-CA3C2E8FEF83}" type="slidenum">
+              <a:rPr lang="en-US" smtClean="0"/>
+              <a:t>5</a:t>
+            </a:fld>
+            <a:endParaRPr lang="en-US"/>
+          </a:p>
+        </p:txBody>
+      </p:sp>
     </p:spTree>
     <p:extLst>
       <p:ext uri="{BB962C8B-B14F-4D97-AF65-F5344CB8AC3E}">
@@ -4670,56 +4998,108 @@
           </a:p>
         </p:txBody>
       </p:sp>
+      <p:sp>
+        <p:nvSpPr>
+          <p:cNvPr id="10" name="Content Placeholder 2">
+            <a:extLst>
+              <a:ext uri="{FF2B5EF4-FFF2-40B4-BE49-F238E27FC236}">
+                <a16:creationId xmlns:a16="http://schemas.microsoft.com/office/drawing/2014/main" id="{4485C2FC-F760-8450-0E62-F59CB3DFE20C}"/>
+              </a:ext>
+            </a:extLst>
+          </p:cNvPr>
+          <p:cNvSpPr>
+            <a:spLocks noGrp="1"/>
+          </p:cNvSpPr>
+          <p:nvPr>
+            <p:ph idx="1"/>
+          </p:nvPr>
+        </p:nvSpPr>
+        <p:spPr>
+          <a:xfrm>
+            <a:off x="304799" y="1600200"/>
+            <a:ext cx="8229599" cy="2539181"/>
+          </a:xfrm>
+        </p:spPr>
+        <p:txBody>
+          <a:bodyPr/>
+          <a:lstStyle/>
+          <a:p>
+            <a:r>
+              <a:rPr lang="en-US" dirty="0"/>
+              <a:t>Midterm exam: 30%</a:t>
+            </a:r>
+          </a:p>
+          <a:p>
+            <a:r>
+              <a:rPr lang="en-US" dirty="0"/>
+              <a:t>Final exam: 40%</a:t>
+            </a:r>
+          </a:p>
+          <a:p>
+            <a:r>
+              <a:rPr lang="en-US" dirty="0"/>
+              <a:t>Labs: 30% (10 + 20)</a:t>
+            </a:r>
+          </a:p>
+          <a:p>
+            <a:r>
+              <a:rPr lang="en-US" dirty="0"/>
+              <a:t>Grade cutoff points are approximate and dependent on overall grade distribution</a:t>
+            </a:r>
+          </a:p>
+          <a:p>
+            <a:pPr lvl="1"/>
+            <a:r>
+              <a:rPr lang="en-US" dirty="0"/>
+              <a:t>Most students </a:t>
+            </a:r>
+            <a:r>
+              <a:rPr lang="en-US"/>
+              <a:t>will pass </a:t>
+            </a:r>
+            <a:r>
+              <a:rPr lang="en-US" dirty="0"/>
+              <a:t>if you put in reasonable efforts</a:t>
+            </a:r>
+          </a:p>
+          <a:p>
+            <a:endParaRPr lang="en-US" dirty="0"/>
+          </a:p>
+        </p:txBody>
+      </p:sp>
       <p:pic>
         <p:nvPicPr>
-          <p:cNvPr id="1026" name="Picture 2" descr="Bell curve graphic depicting normal performance distribution outline diagram. Labeled educational expectation measurement or prediction percentage analysis vector illustration.">
+          <p:cNvPr id="4" name="Picture 3">
             <a:extLst>
               <a:ext uri="{FF2B5EF4-FFF2-40B4-BE49-F238E27FC236}">
-                <a16:creationId xmlns:a16="http://schemas.microsoft.com/office/drawing/2014/main" id="{D2471F95-F060-B55F-2F0D-A33962AFEFDE}"/>
+                <a16:creationId xmlns:a16="http://schemas.microsoft.com/office/drawing/2014/main" id="{6941995E-190C-7957-D9E3-C29097E3AD22}"/>
               </a:ext>
             </a:extLst>
           </p:cNvPr>
           <p:cNvPicPr>
-            <a:picLocks noChangeAspect="1" noChangeArrowheads="1"/>
+            <a:picLocks noChangeAspect="1"/>
           </p:cNvPicPr>
           <p:nvPr/>
         </p:nvPicPr>
         <p:blipFill>
-          <a:blip r:embed="rId3">
-            <a:extLst>
-              <a:ext uri="{28A0092B-C50C-407E-A947-70E740481C1C}">
-                <a14:useLocalDpi xmlns:a14="http://schemas.microsoft.com/office/drawing/2010/main" val="0"/>
-              </a:ext>
-            </a:extLst>
-          </a:blip>
-          <a:srcRect/>
+          <a:blip r:embed="rId3"/>
           <a:stretch>
             <a:fillRect/>
           </a:stretch>
         </p:blipFill>
-        <p:spPr bwMode="auto">
+        <p:spPr>
           <a:xfrm>
-            <a:off x="4572000" y="1858487"/>
-            <a:ext cx="4493342" cy="3744452"/>
+            <a:off x="1460112" y="4091191"/>
+            <a:ext cx="6694873" cy="2174404"/>
           </a:xfrm>
           <a:prstGeom prst="rect">
             <a:avLst/>
           </a:prstGeom>
-          <a:noFill/>
-          <a:extLst>
-            <a:ext uri="{909E8E84-426E-40DD-AFC4-6F175D3DCCD1}">
-              <a14:hiddenFill xmlns:a14="http://schemas.microsoft.com/office/drawing/2010/main">
-                <a:solidFill>
-                  <a:srgbClr val="FFFFFF"/>
-                </a:solidFill>
-              </a14:hiddenFill>
-            </a:ext>
-          </a:extLst>
         </p:spPr>
       </p:pic>
       <p:sp>
         <p:nvSpPr>
-          <p:cNvPr id="6" name="TextBox 5">
+          <p:cNvPr id="5" name="TextBox 4">
             <a:extLst>
               <a:ext uri="{FF2B5EF4-FFF2-40B4-BE49-F238E27FC236}">
                 <a16:creationId xmlns:a16="http://schemas.microsoft.com/office/drawing/2014/main" id="{AE41FB57-E05E-E37B-2179-98D14191727D}"/>
@@ -4731,7 +5111,7 @@
         </p:nvSpPr>
         <p:spPr>
           <a:xfrm>
-            <a:off x="7973827" y="5425615"/>
+            <a:off x="6179599" y="6335311"/>
             <a:ext cx="362600" cy="461665"/>
           </a:xfrm>
           <a:prstGeom prst="rect">
@@ -4754,7 +5134,7 @@
       </p:sp>
       <p:sp>
         <p:nvSpPr>
-          <p:cNvPr id="7" name="TextBox 6">
+          <p:cNvPr id="11" name="TextBox 10">
             <a:extLst>
               <a:ext uri="{FF2B5EF4-FFF2-40B4-BE49-F238E27FC236}">
                 <a16:creationId xmlns:a16="http://schemas.microsoft.com/office/drawing/2014/main" id="{73A14233-5BD4-DCD3-E927-56FF876CF7EA}"/>
@@ -4766,7 +5146,7 @@
         </p:nvSpPr>
         <p:spPr>
           <a:xfrm>
-            <a:off x="6753959" y="5425615"/>
+            <a:off x="4698416" y="6335311"/>
             <a:ext cx="362600" cy="461665"/>
           </a:xfrm>
           <a:prstGeom prst="rect">
@@ -4789,7 +5169,7 @@
       </p:sp>
       <p:sp>
         <p:nvSpPr>
-          <p:cNvPr id="8" name="TextBox 7">
+          <p:cNvPr id="12" name="TextBox 11">
             <a:extLst>
               <a:ext uri="{FF2B5EF4-FFF2-40B4-BE49-F238E27FC236}">
                 <a16:creationId xmlns:a16="http://schemas.microsoft.com/office/drawing/2014/main" id="{5E8C800B-92A5-CEC8-8A8B-200008609C9E}"/>
@@ -4800,9 +5180,9 @@
           <p:nvPr/>
         </p:nvSpPr>
         <p:spPr>
-          <a:xfrm>
-            <a:off x="5548519" y="5425615"/>
-            <a:ext cx="348172" cy="461665"/>
+          <a:xfrm flipH="1">
+            <a:off x="3225575" y="6335311"/>
+            <a:ext cx="434416" cy="461665"/>
           </a:xfrm>
           <a:prstGeom prst="rect">
             <a:avLst/>
@@ -4810,7 +5190,7 @@
           <a:noFill/>
         </p:spPr>
         <p:txBody>
-          <a:bodyPr wrap="none" rtlCol="0">
+          <a:bodyPr wrap="square" rtlCol="0">
             <a:spAutoFit/>
           </a:bodyPr>
           <a:lstStyle/>
@@ -4824,7 +5204,7 @@
       </p:sp>
       <p:sp>
         <p:nvSpPr>
-          <p:cNvPr id="9" name="TextBox 8">
+          <p:cNvPr id="13" name="TextBox 12">
             <a:extLst>
               <a:ext uri="{FF2B5EF4-FFF2-40B4-BE49-F238E27FC236}">
                 <a16:creationId xmlns:a16="http://schemas.microsoft.com/office/drawing/2014/main" id="{6AD677F5-5130-722F-D935-AAD4400A7119}"/>
@@ -4836,7 +5216,7 @@
         </p:nvSpPr>
         <p:spPr>
           <a:xfrm>
-            <a:off x="4697042" y="5425615"/>
+            <a:off x="1902138" y="6335311"/>
             <a:ext cx="468398" cy="461665"/>
           </a:xfrm>
           <a:prstGeom prst="rect">
@@ -4859,72 +5239,261 @@
       </p:sp>
       <p:sp>
         <p:nvSpPr>
-          <p:cNvPr id="10" name="Content Placeholder 2">
+          <p:cNvPr id="14" name="TextBox 13">
             <a:extLst>
               <a:ext uri="{FF2B5EF4-FFF2-40B4-BE49-F238E27FC236}">
-                <a16:creationId xmlns:a16="http://schemas.microsoft.com/office/drawing/2014/main" id="{4485C2FC-F760-8450-0E62-F59CB3DFE20C}"/>
+                <a16:creationId xmlns:a16="http://schemas.microsoft.com/office/drawing/2014/main" id="{D86E3090-D52C-74EE-3FD8-F0F7D63579A8}"/>
               </a:ext>
             </a:extLst>
           </p:cNvPr>
-          <p:cNvSpPr>
-            <a:spLocks noGrp="1"/>
-          </p:cNvSpPr>
-          <p:nvPr>
-            <p:ph idx="1"/>
-          </p:nvPr>
+          <p:cNvSpPr txBox="1"/>
+          <p:nvPr/>
         </p:nvSpPr>
         <p:spPr>
           <a:xfrm>
-            <a:off x="304800" y="1600200"/>
-            <a:ext cx="4267200" cy="4525963"/>
+            <a:off x="5397012" y="6174564"/>
+            <a:ext cx="782587" cy="400110"/>
           </a:xfrm>
+          <a:prstGeom prst="rect">
+            <a:avLst/>
+          </a:prstGeom>
+          <a:noFill/>
         </p:spPr>
         <p:txBody>
-          <a:bodyPr/>
-          <a:lstStyle/>
-          <a:p>
-            <a:r>
-              <a:rPr lang="en-US" dirty="0"/>
-              <a:t>Midterm exam: 30%</a:t>
-            </a:r>
-          </a:p>
-          <a:p>
-            <a:r>
-              <a:rPr lang="en-US" dirty="0"/>
-              <a:t>Final exam: 40%</a:t>
-            </a:r>
-          </a:p>
-          <a:p>
-            <a:r>
-              <a:rPr lang="en-US"/>
-              <a:t>Labs</a:t>
-            </a:r>
-            <a:r>
-              <a:rPr lang="en-US" dirty="0"/>
-              <a:t>: </a:t>
-            </a:r>
-            <a:r>
-              <a:rPr lang="en-US"/>
-              <a:t>30% (10 + 20)</a:t>
-            </a:r>
-            <a:endParaRPr lang="en-US" dirty="0"/>
-          </a:p>
-          <a:p>
-            <a:pPr lvl="1"/>
-            <a:r>
-              <a:rPr lang="en-US" dirty="0"/>
-              <a:t>Graded on a curve based on the final points</a:t>
-            </a:r>
-          </a:p>
-          <a:p>
-            <a:pPr lvl="1"/>
-            <a:r>
-              <a:rPr lang="en-US" dirty="0"/>
-              <a:t>Absolute marks do not matter, but your relative ranking in the class determines your final letter grade</a:t>
-            </a:r>
-          </a:p>
-          <a:p>
-            <a:endParaRPr lang="en-US" dirty="0"/>
+          <a:bodyPr wrap="none" rtlCol="0">
+            <a:spAutoFit/>
+          </a:bodyPr>
+          <a:lstStyle/>
+          <a:p>
+            <a:r>
+              <a:rPr lang="en-US" sz="2000" dirty="0"/>
+              <a:t>85-90</a:t>
+            </a:r>
+          </a:p>
+        </p:txBody>
+      </p:sp>
+      <p:sp>
+        <p:nvSpPr>
+          <p:cNvPr id="15" name="TextBox 14">
+            <a:extLst>
+              <a:ext uri="{FF2B5EF4-FFF2-40B4-BE49-F238E27FC236}">
+                <a16:creationId xmlns:a16="http://schemas.microsoft.com/office/drawing/2014/main" id="{D6628709-AA79-91C6-7670-135A10137CB9}"/>
+              </a:ext>
+            </a:extLst>
+          </p:cNvPr>
+          <p:cNvSpPr txBox="1"/>
+          <p:nvPr/>
+        </p:nvSpPr>
+        <p:spPr>
+          <a:xfrm>
+            <a:off x="3667411" y="6174564"/>
+            <a:ext cx="782587" cy="400110"/>
+          </a:xfrm>
+          <a:prstGeom prst="rect">
+            <a:avLst/>
+          </a:prstGeom>
+          <a:noFill/>
+        </p:spPr>
+        <p:txBody>
+          <a:bodyPr wrap="none" rtlCol="0">
+            <a:spAutoFit/>
+          </a:bodyPr>
+          <a:lstStyle/>
+          <a:p>
+            <a:r>
+              <a:rPr lang="en-US" sz="2000" dirty="0"/>
+              <a:t>70-75</a:t>
+            </a:r>
+          </a:p>
+        </p:txBody>
+      </p:sp>
+      <p:sp>
+        <p:nvSpPr>
+          <p:cNvPr id="16" name="TextBox 15">
+            <a:extLst>
+              <a:ext uri="{FF2B5EF4-FFF2-40B4-BE49-F238E27FC236}">
+                <a16:creationId xmlns:a16="http://schemas.microsoft.com/office/drawing/2014/main" id="{361DE0F8-AE86-B7E3-41E1-FC7BDF3EBD0A}"/>
+              </a:ext>
+            </a:extLst>
+          </p:cNvPr>
+          <p:cNvSpPr txBox="1"/>
+          <p:nvPr/>
+        </p:nvSpPr>
+        <p:spPr>
+          <a:xfrm>
+            <a:off x="2593284" y="6174564"/>
+            <a:ext cx="782587" cy="400110"/>
+          </a:xfrm>
+          <a:prstGeom prst="rect">
+            <a:avLst/>
+          </a:prstGeom>
+          <a:noFill/>
+        </p:spPr>
+        <p:txBody>
+          <a:bodyPr wrap="none" rtlCol="0">
+            <a:spAutoFit/>
+          </a:bodyPr>
+          <a:lstStyle/>
+          <a:p>
+            <a:r>
+              <a:rPr lang="en-US" sz="2000" dirty="0"/>
+              <a:t>60-65</a:t>
+            </a:r>
+          </a:p>
+        </p:txBody>
+      </p:sp>
+      <p:cxnSp>
+        <p:nvCxnSpPr>
+          <p:cNvPr id="18" name="Straight Arrow Connector 17">
+            <a:extLst>
+              <a:ext uri="{FF2B5EF4-FFF2-40B4-BE49-F238E27FC236}">
+                <a16:creationId xmlns:a16="http://schemas.microsoft.com/office/drawing/2014/main" id="{C0E80ACE-A51A-CCB5-6D61-FB78442D180F}"/>
+              </a:ext>
+            </a:extLst>
+          </p:cNvPr>
+          <p:cNvCxnSpPr>
+            <a:cxnSpLocks/>
+          </p:cNvCxnSpPr>
+          <p:nvPr/>
+        </p:nvCxnSpPr>
+        <p:spPr>
+          <a:xfrm>
+            <a:off x="2370536" y="6564723"/>
+            <a:ext cx="855039" cy="2841"/>
+          </a:xfrm>
+          <a:prstGeom prst="straightConnector1">
+            <a:avLst/>
+          </a:prstGeom>
+          <a:ln>
+            <a:headEnd type="triangle"/>
+            <a:tailEnd type="triangle"/>
+          </a:ln>
+        </p:spPr>
+        <p:style>
+          <a:lnRef idx="2">
+            <a:schemeClr val="accent1"/>
+          </a:lnRef>
+          <a:fillRef idx="0">
+            <a:schemeClr val="accent1"/>
+          </a:fillRef>
+          <a:effectRef idx="1">
+            <a:schemeClr val="accent1"/>
+          </a:effectRef>
+          <a:fontRef idx="minor">
+            <a:schemeClr val="tx1"/>
+          </a:fontRef>
+        </p:style>
+      </p:cxnSp>
+      <p:cxnSp>
+        <p:nvCxnSpPr>
+          <p:cNvPr id="20" name="Straight Arrow Connector 19">
+            <a:extLst>
+              <a:ext uri="{FF2B5EF4-FFF2-40B4-BE49-F238E27FC236}">
+                <a16:creationId xmlns:a16="http://schemas.microsoft.com/office/drawing/2014/main" id="{32AB04AC-00A9-C51E-9E21-EC80A92DCD51}"/>
+              </a:ext>
+            </a:extLst>
+          </p:cNvPr>
+          <p:cNvCxnSpPr>
+            <a:cxnSpLocks/>
+          </p:cNvCxnSpPr>
+          <p:nvPr/>
+        </p:nvCxnSpPr>
+        <p:spPr>
+          <a:xfrm flipV="1">
+            <a:off x="3675379" y="6566142"/>
+            <a:ext cx="1023037" cy="15641"/>
+          </a:xfrm>
+          <a:prstGeom prst="straightConnector1">
+            <a:avLst/>
+          </a:prstGeom>
+          <a:ln>
+            <a:headEnd type="triangle"/>
+            <a:tailEnd type="triangle"/>
+          </a:ln>
+        </p:spPr>
+        <p:style>
+          <a:lnRef idx="2">
+            <a:schemeClr val="accent1"/>
+          </a:lnRef>
+          <a:fillRef idx="0">
+            <a:schemeClr val="accent1"/>
+          </a:fillRef>
+          <a:effectRef idx="1">
+            <a:schemeClr val="accent1"/>
+          </a:effectRef>
+          <a:fontRef idx="minor">
+            <a:schemeClr val="tx1"/>
+          </a:fontRef>
+        </p:style>
+      </p:cxnSp>
+      <p:cxnSp>
+        <p:nvCxnSpPr>
+          <p:cNvPr id="22" name="Straight Arrow Connector 21">
+            <a:extLst>
+              <a:ext uri="{FF2B5EF4-FFF2-40B4-BE49-F238E27FC236}">
+                <a16:creationId xmlns:a16="http://schemas.microsoft.com/office/drawing/2014/main" id="{2E058877-9E26-CD16-4D9E-416ACBDE6556}"/>
+              </a:ext>
+            </a:extLst>
+          </p:cNvPr>
+          <p:cNvCxnSpPr>
+            <a:cxnSpLocks/>
+          </p:cNvCxnSpPr>
+          <p:nvPr/>
+        </p:nvCxnSpPr>
+        <p:spPr>
+          <a:xfrm flipV="1">
+            <a:off x="5061016" y="6565571"/>
+            <a:ext cx="1118583" cy="25063"/>
+          </a:xfrm>
+          <a:prstGeom prst="straightConnector1">
+            <a:avLst/>
+          </a:prstGeom>
+          <a:ln>
+            <a:headEnd type="triangle"/>
+            <a:tailEnd type="triangle"/>
+          </a:ln>
+        </p:spPr>
+        <p:style>
+          <a:lnRef idx="2">
+            <a:schemeClr val="accent1"/>
+          </a:lnRef>
+          <a:fillRef idx="0">
+            <a:schemeClr val="accent1"/>
+          </a:fillRef>
+          <a:effectRef idx="1">
+            <a:schemeClr val="accent1"/>
+          </a:effectRef>
+          <a:fontRef idx="minor">
+            <a:schemeClr val="tx1"/>
+          </a:fontRef>
+        </p:style>
+      </p:cxnSp>
+      <p:sp>
+        <p:nvSpPr>
+          <p:cNvPr id="25" name="Slide Number Placeholder 24">
+            <a:extLst>
+              <a:ext uri="{FF2B5EF4-FFF2-40B4-BE49-F238E27FC236}">
+                <a16:creationId xmlns:a16="http://schemas.microsoft.com/office/drawing/2014/main" id="{E8900106-E74B-992C-698F-44FB66ACC5A1}"/>
+              </a:ext>
+            </a:extLst>
+          </p:cNvPr>
+          <p:cNvSpPr>
+            <a:spLocks noGrp="1"/>
+          </p:cNvSpPr>
+          <p:nvPr>
+            <p:ph type="sldNum" sz="quarter" idx="12"/>
+          </p:nvPr>
+        </p:nvSpPr>
+        <p:spPr/>
+        <p:txBody>
+          <a:bodyPr/>
+          <a:lstStyle/>
+          <a:p>
+            <a:fld id="{325BE2B7-23DB-644D-89A2-CA3C2E8FEF83}" type="slidenum">
+              <a:rPr lang="en-US" smtClean="0"/>
+              <a:t>6</a:t>
+            </a:fld>
+            <a:endParaRPr lang="en-US"/>
           </a:p>
         </p:txBody>
       </p:sp>
